--- a/resources/powerpoint/synchronisation-rollout-vorlage.pptx
+++ b/resources/powerpoint/synchronisation-rollout-vorlage.pptx
@@ -32074,7 +32074,7 @@
           <a:p>
             <a:r>
               <a:rPr lang="de-DE" dirty="0"/>
-              <a:t>Die Unterlage ist eine Arbeitsunterlage intern zur Verwendung zwischen Regionalverbänden, den Verbunddienstleistern und dem DSGV – daher als intern zu behandeln.</a:t>
+              <a:t>Die Unterlage ist eine interne Arbeitsunterlage zur Verwendung zwischen Regionalverbänden, den Verbunddienstleistern und dem DSGV – daher vertraulich zu behandeln.</a:t>
             </a:r>
           </a:p>
           <a:p>
